--- a/els-sales-deck.pptx
+++ b/els-sales-deck.pptx
@@ -1582,7 +1582,7 @@
                 <a:ea typeface="맑은 고딕" pitchFamily="34" charset="-122"/>
                 <a:cs typeface="맑은 고딕" pitchFamily="34" charset="-120"/>
               </a:rPr>
-              <a:t>제38109회 EuroStoxx50·S&amp;P500·KOSPI200</a:t>
+              <a:t>제38109회 EuroStoxx50·S&amp;P500·KOSPI200 (온라인 전용)</a:t>
             </a:r>
             <a:endParaRPr lang="en-US" sz="1450" dirty="0"/>
           </a:p>
@@ -3830,7 +3830,21 @@
                           <a:ea typeface="맑은 고딕" pitchFamily="34" charset="-122"/>
                           <a:cs typeface="맑은 고딕" pitchFamily="34" charset="-120"/>
                         </a:rPr>
-                        <a:t>EuroStoxx50·S&amp;P500·KOSPI200</a:t>
+                        <a:t>EuroStoxx50·S&amp;P500·KOSPI200  </a:t>
+                      </a:r>
+                      <a:pPr indent="0" marL="0">
+                        <a:buNone/>
+                      </a:pPr>
+                      <a:r>
+                        <a:rPr lang="en-US" sz="750" b="1" dirty="0">
+                          <a:solidFill>
+                            <a:srgbClr val="043B72"/>
+                          </a:solidFill>
+                          <a:latin typeface="맑은 고딕" pitchFamily="34" charset="0"/>
+                          <a:ea typeface="맑은 고딕" pitchFamily="34" charset="-122"/>
+                          <a:cs typeface="맑은 고딕" pitchFamily="34" charset="-120"/>
+                        </a:rPr>
+                        <a:t>온라인</a:t>
                       </a:r>
                       <a:endParaRPr lang="en-US" sz="850" dirty="0">
                         <a:latin typeface="맑은 고딕" charset="0"/>
@@ -4648,7 +4662,21 @@
                           <a:ea typeface="맑은 고딕" pitchFamily="34" charset="-122"/>
                           <a:cs typeface="맑은 고딕" pitchFamily="34" charset="-120"/>
                         </a:rPr>
-                        <a:t>KOSPI200·삼성전자</a:t>
+                        <a:t>KOSPI200·삼성전자  </a:t>
+                      </a:r>
+                      <a:pPr indent="0" marL="0">
+                        <a:buNone/>
+                      </a:pPr>
+                      <a:r>
+                        <a:rPr lang="en-US" sz="750" b="1" dirty="0">
+                          <a:solidFill>
+                            <a:srgbClr val="043B72"/>
+                          </a:solidFill>
+                          <a:latin typeface="맑은 고딕" pitchFamily="34" charset="0"/>
+                          <a:ea typeface="맑은 고딕" pitchFamily="34" charset="-122"/>
+                          <a:cs typeface="맑은 고딕" pitchFamily="34" charset="-120"/>
+                        </a:rPr>
+                        <a:t>온라인</a:t>
                       </a:r>
                       <a:endParaRPr lang="en-US" sz="850" dirty="0">
                         <a:latin typeface="맑은 고딕" charset="0"/>
@@ -5466,7 +5494,21 @@
                           <a:ea typeface="맑은 고딕" pitchFamily="34" charset="-122"/>
                           <a:cs typeface="맑은 고딕" pitchFamily="34" charset="-120"/>
                         </a:rPr>
-                        <a:t>삼성전자·SK하이닉스</a:t>
+                        <a:t>삼성전자·SK하이닉스  </a:t>
+                      </a:r>
+                      <a:pPr indent="0" marL="0">
+                        <a:buNone/>
+                      </a:pPr>
+                      <a:r>
+                        <a:rPr lang="en-US" sz="750" b="1" dirty="0">
+                          <a:solidFill>
+                            <a:srgbClr val="043B72"/>
+                          </a:solidFill>
+                          <a:latin typeface="맑은 고딕" pitchFamily="34" charset="0"/>
+                          <a:ea typeface="맑은 고딕" pitchFamily="34" charset="-122"/>
+                          <a:cs typeface="맑은 고딕" pitchFamily="34" charset="-120"/>
+                        </a:rPr>
+                        <a:t>온라인</a:t>
                       </a:r>
                       <a:endParaRPr lang="en-US" sz="850" dirty="0">
                         <a:latin typeface="맑은 고딕" charset="0"/>
@@ -13646,7 +13688,21 @@
                           <a:ea typeface="맑은 고딕" pitchFamily="34" charset="-122"/>
                           <a:cs typeface="맑은 고딕" pitchFamily="34" charset="-120"/>
                         </a:rPr>
-                        <a:t>테슬라·팔란티어 테크</a:t>
+                        <a:t>테슬라·팔란티어 테크  </a:t>
+                      </a:r>
+                      <a:pPr indent="0" marL="0">
+                        <a:buNone/>
+                      </a:pPr>
+                      <a:r>
+                        <a:rPr lang="en-US" sz="750" b="1" dirty="0">
+                          <a:solidFill>
+                            <a:srgbClr val="043B72"/>
+                          </a:solidFill>
+                          <a:latin typeface="맑은 고딕" pitchFamily="34" charset="0"/>
+                          <a:ea typeface="맑은 고딕" pitchFamily="34" charset="-122"/>
+                          <a:cs typeface="맑은 고딕" pitchFamily="34" charset="-120"/>
+                        </a:rPr>
+                        <a:t>온라인</a:t>
                       </a:r>
                       <a:endParaRPr lang="en-US" sz="850" dirty="0">
                         <a:latin typeface="맑은 고딕" charset="0"/>
@@ -14464,7 +14520,21 @@
                           <a:ea typeface="맑은 고딕" pitchFamily="34" charset="-122"/>
                           <a:cs typeface="맑은 고딕" pitchFamily="34" charset="-120"/>
                         </a:rPr>
-                        <a:t>KOSPI200·마이크론 테크놀로지</a:t>
+                        <a:t>KOSPI200·마이크론 테크놀로지  </a:t>
+                      </a:r>
+                      <a:pPr indent="0" marL="0">
+                        <a:buNone/>
+                      </a:pPr>
+                      <a:r>
+                        <a:rPr lang="en-US" sz="750" b="1" dirty="0">
+                          <a:solidFill>
+                            <a:srgbClr val="043B72"/>
+                          </a:solidFill>
+                          <a:latin typeface="맑은 고딕" pitchFamily="34" charset="0"/>
+                          <a:ea typeface="맑은 고딕" pitchFamily="34" charset="-122"/>
+                          <a:cs typeface="맑은 고딕" pitchFamily="34" charset="-120"/>
+                        </a:rPr>
+                        <a:t>온라인</a:t>
                       </a:r>
                       <a:endParaRPr lang="en-US" sz="850" dirty="0">
                         <a:latin typeface="맑은 고딕" charset="0"/>
@@ -15282,7 +15352,21 @@
                           <a:ea typeface="맑은 고딕" pitchFamily="34" charset="-122"/>
                           <a:cs typeface="맑은 고딕" pitchFamily="34" charset="-120"/>
                         </a:rPr>
-                        <a:t>마이크론 테크놀로지·AMD</a:t>
+                        <a:t>마이크론 테크놀로지·AMD  </a:t>
+                      </a:r>
+                      <a:pPr indent="0" marL="0">
+                        <a:buNone/>
+                      </a:pPr>
+                      <a:r>
+                        <a:rPr lang="en-US" sz="750" b="1" dirty="0">
+                          <a:solidFill>
+                            <a:srgbClr val="043B72"/>
+                          </a:solidFill>
+                          <a:latin typeface="맑은 고딕" pitchFamily="34" charset="0"/>
+                          <a:ea typeface="맑은 고딕" pitchFamily="34" charset="-122"/>
+                          <a:cs typeface="맑은 고딕" pitchFamily="34" charset="-120"/>
+                        </a:rPr>
+                        <a:t>온라인</a:t>
                       </a:r>
                       <a:endParaRPr lang="en-US" sz="850" dirty="0">
                         <a:latin typeface="맑은 고딕" charset="0"/>
@@ -16141,13 +16225,13 @@
             <a:r>
               <a:rPr lang="en-US" sz="900" b="1" dirty="0">
                 <a:solidFill>
-                  <a:srgbClr val="C62828"/>
+                  <a:srgbClr val="043B72"/>
                 </a:solidFill>
                 <a:latin typeface="맑은 고딕" pitchFamily="34" charset="0"/>
                 <a:ea typeface="맑은 고딕" pitchFamily="34" charset="-122"/>
                 <a:cs typeface="맑은 고딕" pitchFamily="34" charset="-120"/>
               </a:rPr>
-              <a:t>온라인 전용 여부는 미확인</a:t>
+              <a:t>온라인</a:t>
             </a:r>
             <a:pPr indent="0" marL="0">
               <a:lnSpc>
@@ -16164,7 +16248,7 @@
                 <a:ea typeface="맑은 고딕" pitchFamily="34" charset="-122"/>
                 <a:cs typeface="맑은 고딕" pitchFamily="34" charset="-120"/>
               </a:rPr>
-              <a:t> — 홈페이지 상품목록이 2026.09.07 확인 시점에 이번 회차를 아직 싣지 않았습니다. 청약 전 목록에서 확인하세요.  </a:t>
+              <a:t> 표시는 영업점 창구 청약이 안 되는 상품입니다.  </a:t>
             </a:r>
             <a:pPr indent="0" marL="0">
               <a:lnSpc>
@@ -16479,7 +16563,7 @@
                 <a:ea typeface="맑은 고딕" pitchFamily="34" charset="-122"/>
                 <a:cs typeface="맑은 고딕" pitchFamily="34" charset="-120"/>
               </a:rPr>
-              <a:t>EuroStoxx50 · S&amp;P500 · KOSPI200</a:t>
+              <a:t>EuroStoxx50 · S&amp;P500 · KOSPI200 (온라인 전용)</a:t>
             </a:r>
             <a:endParaRPr lang="en-US" sz="1100" dirty="0"/>
           </a:p>
@@ -19823,7 +19907,7 @@
                 <a:ea typeface="맑은 고딕" pitchFamily="34" charset="-122"/>
                 <a:cs typeface="맑은 고딕" pitchFamily="34" charset="-120"/>
               </a:rPr>
-              <a:t>마이크론 테크놀로지 · AMD</a:t>
+              <a:t>마이크론 테크놀로지 · AMD (온라인 전용)</a:t>
             </a:r>
             <a:endParaRPr lang="en-US" sz="1000" dirty="0"/>
           </a:p>
@@ -20355,7 +20439,7 @@
                 <a:ea typeface="맑은 고딕" pitchFamily="34" charset="-122"/>
                 <a:cs typeface="맑은 고딕" pitchFamily="34" charset="-120"/>
               </a:rPr>
-              <a:t>KOSPI200 · 마이크론 테크놀로지</a:t>
+              <a:t>KOSPI200 · 마이크론 테크놀로지 (온라인 전용)</a:t>
             </a:r>
             <a:endParaRPr lang="en-US" sz="1000" dirty="0"/>
           </a:p>
@@ -20887,7 +20971,7 @@
                 <a:ea typeface="맑은 고딕" pitchFamily="34" charset="-122"/>
                 <a:cs typeface="맑은 고딕" pitchFamily="34" charset="-120"/>
               </a:rPr>
-              <a:t>테슬라 · 팔란티어 테크</a:t>
+              <a:t>테슬라 · 팔란티어 테크 (온라인 전용)</a:t>
             </a:r>
             <a:endParaRPr lang="en-US" sz="1000" dirty="0"/>
           </a:p>
@@ -24612,7 +24696,7 @@
                 <a:ea typeface="맑은 고딕" pitchFamily="34" charset="-122"/>
                 <a:cs typeface="맑은 고딕" pitchFamily="34" charset="-120"/>
               </a:rPr>
-              <a:t>제38112회는 기초자산 상장이 늦어 검증 표본이 2.9년뿐입니다 — A 열을 20년 상품과 같은 줄에서 비교할 수 없습니다. 온라인 전용(창구 청약 불가) 여부는 미확인 — 홈페이지 목록이 2026.09.07 확인 시점에 이번 회차를 아직 싣지 않았습니다.</a:t>
+              <a:t>제38112회는 기초자산 상장이 늦어 검증 표본이 2.9년뿐입니다 — A 열을 20년 상품과 같은 줄에서 비교할 수 없습니다.</a:t>
             </a:r>
             <a:endParaRPr lang="en-US" sz="850" dirty="0"/>
           </a:p>
